--- a/docs/presentations/20261008/XHarness-introduction-final.pptx
+++ b/docs/presentations/20261008/XHarness-introduction-final.pptx
@@ -2,19 +2,19 @@
 <file path=ppt/presentation.xml><?xml version="1.0" encoding="utf-8"?>
 <p:presentation xmlns:p="http://schemas.openxmlformats.org/presentationml/2006/main">
   <p:sldMasterIdLst>
-    <p:sldMasterId xmlns:r="http://schemas.openxmlformats.org/officeDocument/2006/relationships" id="2147483648" r:id="R1c2237a9a40e4f23"/>
+    <p:sldMasterId xmlns:r="http://schemas.openxmlformats.org/officeDocument/2006/relationships" id="2147483648" r:id="R2f254c728d7c4670"/>
   </p:sldMasterIdLst>
   <p:notesMasterIdLst>
-    <p:notesMasterId xmlns:r="http://schemas.openxmlformats.org/officeDocument/2006/relationships" r:id="R73c1aafb1cda4071"/>
+    <p:notesMasterId xmlns:r="http://schemas.openxmlformats.org/officeDocument/2006/relationships" r:id="R6a0cfa89cda047a1"/>
   </p:notesMasterIdLst>
   <p:sldIdLst>
-    <p:sldId xmlns:r="http://schemas.openxmlformats.org/officeDocument/2006/relationships" id="256" r:id="R3cd5911e88fb414c"/>
-    <p:sldId xmlns:r="http://schemas.openxmlformats.org/officeDocument/2006/relationships" id="257" r:id="Rfa309646487741f1"/>
-    <p:sldId xmlns:r="http://schemas.openxmlformats.org/officeDocument/2006/relationships" id="258" r:id="R27f7b562b6794900"/>
-    <p:sldId xmlns:r="http://schemas.openxmlformats.org/officeDocument/2006/relationships" id="259" r:id="R98bf77437281417e"/>
-    <p:sldId xmlns:r="http://schemas.openxmlformats.org/officeDocument/2006/relationships" id="260" r:id="R3c5cb5632e9046cf"/>
-    <p:sldId xmlns:r="http://schemas.openxmlformats.org/officeDocument/2006/relationships" id="261" r:id="R4616f1951dd84484"/>
-    <p:sldId xmlns:r="http://schemas.openxmlformats.org/officeDocument/2006/relationships" id="262" r:id="R95dfffad18fe4c64"/>
+    <p:sldId xmlns:r="http://schemas.openxmlformats.org/officeDocument/2006/relationships" id="256" r:id="R5b4c8ef4fc2a4ae7"/>
+    <p:sldId xmlns:r="http://schemas.openxmlformats.org/officeDocument/2006/relationships" id="257" r:id="R144ea369c32645b8"/>
+    <p:sldId xmlns:r="http://schemas.openxmlformats.org/officeDocument/2006/relationships" id="258" r:id="R31fc3ae4e99c4806"/>
+    <p:sldId xmlns:r="http://schemas.openxmlformats.org/officeDocument/2006/relationships" id="259" r:id="Rcba373bdfa1d42d8"/>
+    <p:sldId xmlns:r="http://schemas.openxmlformats.org/officeDocument/2006/relationships" id="260" r:id="R2070d9e1497748d0"/>
+    <p:sldId xmlns:r="http://schemas.openxmlformats.org/officeDocument/2006/relationships" id="261" r:id="Rda1cb892ac7c4c0a"/>
+    <p:sldId xmlns:r="http://schemas.openxmlformats.org/officeDocument/2006/relationships" id="262" r:id="R97a5cfbc8c924d53"/>
   </p:sldIdLst>
   <p:sldSz cx="12191999" cy="6858000"/>
   <p:notesSz cx="6858000" cy="9144000"/>
@@ -471,17 +471,7 @@
           <a:lstStyle xmlns:a="http://schemas.openxmlformats.org/drawingml/2006/main"/>
           <a:p xmlns:a="http://schemas.openxmlformats.org/drawingml/2006/main">
             <a:r>
-              <a:t>2026-10-08。最新main 9265300の7枚構成を基に改訂。SPEC.md §7・§10・§15。</a:t>
-            </a:r>
-          </a:p>
-          <a:p xmlns:a="http://schemas.openxmlformats.org/drawingml/2006/main">
-            <a:r>
-              <a:t>画面出典: C:/Users/ahwri/Documents/Codex/2026-10-05/task/Xharness-connections/.out/limited-98496fb-packaged-gui/smoke-scratch-ping-pong-and-panel-switching-packaged/pong.png</a:t>
-            </a:r>
-          </a:p>
-          <a:p xmlns:a="http://schemas.openxmlformats.org/drawingml/2006/main">
-            <a:r>
-              <a:t>保存済み実画面 / テスト用データ・旧検証版。画像の内容は変更せず、必要な範囲を切り出した。保存済み画像は旧UIであり現在の仕様と区別する。HTML画面はdocs/examples/execution-report.htmlをEdge headlessで表示したもの。実モデル通信やアプリ起動は行っていない。機能ごとに対応経路が異なり、同じworkflowで全機能が同時に使えるとは意味しない。</a:t>
+              <a:t>出典: docs/codex-prerelease-live-20261008.md。基準HEAD 27262a3の未コミット差分から作成したv3配布物。Codex CLI 0.162.0-alpha.20、Claude SDK 0.3.293。合成課題の実通信画面。D:/AIwork/Xharness/.out/codex-alpha20-live-20261008/screenshots/haiku-conversation.jpg。画像内容の改変なし、切り出しのみ。両方向の実装・独立テスト・別会社レビューが完了。指摘は0件のため修正サイクルは今回未検証。</a:t>
             </a:r>
           </a:p>
         </p:txBody>
@@ -551,22 +541,7 @@
           <a:lstStyle xmlns:a="http://schemas.openxmlformats.org/drawingml/2006/main"/>
           <a:p xmlns:a="http://schemas.openxmlformats.org/drawingml/2006/main">
             <a:r>
-              <a:t>2026-10-08。最新main 9265300の7枚構成を基に改訂。SPEC.md §7・§10・§15。</a:t>
-            </a:r>
-          </a:p>
-          <a:p xmlns:a="http://schemas.openxmlformats.org/drawingml/2006/main">
-            <a:r>
-              <a:t>画面出典: C:/Users/ahwri/Documents/Codex/2026-10-05/task/Xharness-connections/.out/ui-check-official-display.png</a:t>
-            </a:r>
-          </a:p>
-          <a:p xmlns:a="http://schemas.openxmlformats.org/drawingml/2006/main">
-            <a:r>
-              <a:t>C:/Users/ahwri/Documents/Codex/2026-10-05/task/Xharness-connections/.out/packaged-live-6bd74a0-final-ui.png</a:t>
-            </a:r>
-          </a:p>
-          <a:p xmlns:a="http://schemas.openxmlformats.org/drawingml/2006/main">
-            <a:r>
-              <a:t>保存済みの担当選択・結果画面 / 現行は選択中のメインモデルで計画。画像の内容は変更せず、必要な範囲を切り出した。保存済み画像は旧UIであり現在の仕様と区別する。HTML画面はdocs/examples/execution-report.htmlをEdge headlessで表示したもの。実モデル通信やアプリ起動は行っていない。機能ごとに対応経路が異なり、同じworkflowで全機能が同時に使えるとは意味しない。</a:t>
+              <a:t>出典: docs/codex-prerelease-live-20261008.md。基準HEAD 27262a3の未コミット差分から作成したv3配布物。Codex CLI 0.162.0-alpha.20、Claude SDK 0.3.293。合成課題の実通信画面。D:/AIwork/Xharness/.out/codex-alpha20-live-20261008/screenshots/claude-completed.jpg。画像内容の改変なし、切り出しのみ。両方向の実装・独立テスト・別会社レビューが完了。指摘は0件のため修正サイクルは今回未検証。</a:t>
             </a:r>
           </a:p>
         </p:txBody>
@@ -636,17 +611,7 @@
           <a:lstStyle xmlns:a="http://schemas.openxmlformats.org/drawingml/2006/main"/>
           <a:p xmlns:a="http://schemas.openxmlformats.org/drawingml/2006/main">
             <a:r>
-              <a:t>2026-10-08。最新main 9265300の7枚構成を基に改訂。SPEC.md §7・§10・§15。</a:t>
-            </a:r>
-          </a:p>
-          <a:p xmlns:a="http://schemas.openxmlformats.org/drawingml/2006/main">
-            <a:r>
-              <a:t>画面出典: C:/Users/ahwri/Documents/Codex/2026-10-05/task/Xharness-connections/.out/limited-98496fb-packaged-gui/smoke-scratch-ping-pong-and-panel-switching-packaged/flow.png</a:t>
-            </a:r>
-          </a:p>
-          <a:p xmlns:a="http://schemas.openxmlformats.org/drawingml/2006/main">
-            <a:r>
-              <a:t>保存済み実画面 / テスト用データ・旧検証版。画像の内容は変更せず、必要な範囲を切り出した。保存済み画像は旧UIであり現在の仕様と区別する。HTML画面はdocs/examples/execution-report.htmlをEdge headlessで表示したもの。実モデル通信やアプリ起動は行っていない。機能ごとに対応経路が異なり、同じworkflowで全機能が同時に使えるとは意味しない。</a:t>
+              <a:t>出典: docs/codex-prerelease-live-20261008.md。基準HEAD 27262a3の未コミット差分から作成したv3配布物。Codex CLI 0.162.0-alpha.20、Claude SDK 0.3.293。合成課題の実通信画面。D:/AIwork/Xharness/.out/codex-alpha20-live-20261008/screenshots/codex-completed.jpg。画像内容の改変なし、切り出しのみ。両方向の実装・独立テスト・別会社レビューが完了。指摘は0件のため修正サイクルは今回未検証。</a:t>
             </a:r>
           </a:p>
         </p:txBody>
@@ -716,17 +681,7 @@
           <a:lstStyle xmlns:a="http://schemas.openxmlformats.org/drawingml/2006/main"/>
           <a:p xmlns:a="http://schemas.openxmlformats.org/drawingml/2006/main">
             <a:r>
-              <a:t>2026-10-08。最新main 9265300の7枚構成を基に改訂。SPEC.md §7・§10・§15。</a:t>
-            </a:r>
-          </a:p>
-          <a:p xmlns:a="http://schemas.openxmlformats.org/drawingml/2006/main">
-            <a:r>
-              <a:t>画面出典: D:/AIwork/Xharness/.out/presentation-revision-20261008/build/report-success.png</a:t>
-            </a:r>
-          </a:p>
-          <a:p xmlns:a="http://schemas.openxmlformats.org/drawingml/2006/main">
-            <a:r>
-              <a:t>実際のHTML出力画面 / デモ記録・模擬通信。画像の内容は変更せず、必要な範囲を切り出した。保存済み画像は旧UIであり現在の仕様と区別する。HTML画面はdocs/examples/execution-report.htmlをEdge headlessで表示したもの。実モデル通信やアプリ起動は行っていない。機能ごとに対応経路が異なり、同じworkflowで全機能が同時に使えるとは意味しない。</a:t>
+              <a:t>元資料を保持。実際のHTML出力画面 / デモ記録・模擬通信。D:/AIwork/Xharness/.out/presentation-revision-20261008/build/report-success.png。通常workflowと旧経路は対応範囲が異なる。今回の通常workflowで結果受け渡しは拒否。枠待ち再開と子エージェントは今回未検証。</a:t>
             </a:r>
           </a:p>
         </p:txBody>
@@ -796,17 +751,7 @@
           <a:lstStyle xmlns:a="http://schemas.openxmlformats.org/drawingml/2006/main"/>
           <a:p xmlns:a="http://schemas.openxmlformats.org/drawingml/2006/main">
             <a:r>
-              <a:t>2026-10-08。最新main 9265300の7枚構成を基に改訂。SPEC.md §7・§10・§15。</a:t>
-            </a:r>
-          </a:p>
-          <a:p xmlns:a="http://schemas.openxmlformats.org/drawingml/2006/main">
-            <a:r>
-              <a:t>画面出典: C:/Users/ahwri/Documents/Codex/2026-10-05/task/Xharness-connections/.out/limited-98496fb-packaged-gui/handoffs-fake-result-deliv-92c6b-er-reload-without-execution-packaged/handoff-inbox.png</a:t>
-            </a:r>
-          </a:p>
-          <a:p xmlns:a="http://schemas.openxmlformats.org/drawingml/2006/main">
-            <a:r>
-              <a:t>保存済み実画面 / テスト用データ・旧検証版。画像の内容は変更せず、必要な範囲を切り出した。保存済み画像は旧UIであり現在の仕様と区別する。HTML画面はdocs/examples/execution-report.htmlをEdge headlessで表示したもの。実モデル通信やアプリ起動は行っていない。機能ごとに対応経路が異なり、同じworkflowで全機能が同時に使えるとは意味しない。</a:t>
+              <a:t>元資料を保持。旧経路の模擬画面 / 現在の通常workflowでは利用不可。C:/Users/ahwri/Documents/Codex/2026-10-05/task/Xharness-connections/.out/limited-98496fb-packaged-gui/handoffs-fake-result-deliv-92c6b-er-reload-without-execution-packaged/handoff-inbox.png。通常workflowと旧経路は対応範囲が異なる。今回の通常workflowで結果受け渡しは拒否。枠待ち再開と子エージェントは今回未検証。</a:t>
             </a:r>
           </a:p>
         </p:txBody>
@@ -876,17 +821,7 @@
           <a:lstStyle xmlns:a="http://schemas.openxmlformats.org/drawingml/2006/main"/>
           <a:p xmlns:a="http://schemas.openxmlformats.org/drawingml/2006/main">
             <a:r>
-              <a:t>2026-10-08。最新main 9265300の7枚構成を基に改訂。SPEC.md §7・§10・§15。</a:t>
-            </a:r>
-          </a:p>
-          <a:p xmlns:a="http://schemas.openxmlformats.org/drawingml/2006/main">
-            <a:r>
-              <a:t>画面出典: C:/Users/ahwri/Documents/Codex/2026-10-05/task/Xharness-connections/.out/limited-98496fb-packaged-gui/quota-resume-fake-quota-UI-d758d-d-exposes-opt-in-and-cancel-packaged/quota-cancelled.png</a:t>
-            </a:r>
-          </a:p>
-          <a:p xmlns:a="http://schemas.openxmlformats.org/drawingml/2006/main">
-            <a:r>
-              <a:t>枠待ちを取り消した実画面 / 模擬データ。待機中・再開成功の画面ではありません。画像の内容は変更せず、必要な範囲を切り出した。保存済み画像は旧UIであり現在の仕様と区別する。HTML画面はdocs/examples/execution-report.htmlをEdge headlessで表示したもの。実モデル通信やアプリ起動は行っていない。機能ごとに対応経路が異なり、同じworkflowで全機能が同時に使えるとは意味しない。</a:t>
+              <a:t>元資料を保持。枠待ちを取り消した実画面 / 模擬データ。待機中・再開成功の画面ではありません。C:/Users/ahwri/Documents/Codex/2026-10-05/task/Xharness-connections/.out/limited-98496fb-packaged-gui/quota-resume-fake-quota-UI-d758d-d-exposes-opt-in-and-cancel-packaged/quota-cancelled.png。通常workflowと旧経路は対応範囲が異なる。今回の通常workflowで結果受け渡しは拒否。枠待ち再開と子エージェントは今回未検証。</a:t>
             </a:r>
           </a:p>
         </p:txBody>
@@ -956,17 +891,7 @@
           <a:lstStyle xmlns:a="http://schemas.openxmlformats.org/drawingml/2006/main"/>
           <a:p xmlns:a="http://schemas.openxmlformats.org/drawingml/2006/main">
             <a:r>
-              <a:t>2026-10-08。最新main 9265300の7枚構成を基に改訂。SPEC.md §7・§10・§15。</a:t>
-            </a:r>
-          </a:p>
-          <a:p xmlns:a="http://schemas.openxmlformats.org/drawingml/2006/main">
-            <a:r>
-              <a:t>画面出典: D:/AIwork/Xharness/.out/presentation-revision-20261008/build/report-child.png</a:t>
-            </a:r>
-          </a:p>
-          <a:p xmlns:a="http://schemas.openxmlformats.org/drawingml/2006/main">
-            <a:r>
-              <a:t>実際のHTML出力画面 / 子のデモ記録・模擬通信。画像の内容は変更せず、必要な範囲を切り出した。保存済み画像は旧UIであり現在の仕様と区別する。HTML画面はdocs/examples/execution-report.htmlをEdge headlessで表示したもの。実モデル通信やアプリ起動は行っていない。機能ごとに対応経路が異なり、同じworkflowで全機能が同時に使えるとは意味しない。</a:t>
+              <a:t>元資料を保持。実際のHTML出力画面 / 子のデモ記録・模擬通信。D:/AIwork/Xharness/.out/presentation-revision-20261008/build/report-child.png。通常workflowと旧経路は対応範囲が異なる。今回の通常workflowで結果受け渡しは拒否。枠待ち再開と子エージェントは今回未検証。</a:t>
             </a:r>
           </a:p>
         </p:txBody>
@@ -3993,17 +3918,17 @@
   </p:cSld>
   <p:clrMap bg1="lt1" tx1="dk1" bg2="lt2" tx2="dk2" accent1="accent1" accent2="accent2" accent3="accent3" accent4="accent4" accent5="accent5" accent6="accent6" hlink="hlink" folHlink="folHlink"/>
   <p:sldLayoutIdLst>
-    <p:sldLayoutId xmlns:r="http://schemas.openxmlformats.org/officeDocument/2006/relationships" id="2147483649" r:id="Rdac7925a4e384b72"/>
-    <p:sldLayoutId xmlns:r="http://schemas.openxmlformats.org/officeDocument/2006/relationships" id="2147483650" r:id="Rac285fa02409421e"/>
-    <p:sldLayoutId xmlns:r="http://schemas.openxmlformats.org/officeDocument/2006/relationships" id="2147483651" r:id="R2bbc742084584a02"/>
-    <p:sldLayoutId xmlns:r="http://schemas.openxmlformats.org/officeDocument/2006/relationships" id="2147483652" r:id="R76c8b91cd31a491c"/>
-    <p:sldLayoutId xmlns:r="http://schemas.openxmlformats.org/officeDocument/2006/relationships" id="2147483653" r:id="Rfd6690adde204549"/>
-    <p:sldLayoutId xmlns:r="http://schemas.openxmlformats.org/officeDocument/2006/relationships" id="2147483654" r:id="R5c8d8796027c4e77"/>
-    <p:sldLayoutId xmlns:r="http://schemas.openxmlformats.org/officeDocument/2006/relationships" id="2147483655" r:id="Rc14b00227ce5476e"/>
-    <p:sldLayoutId xmlns:r="http://schemas.openxmlformats.org/officeDocument/2006/relationships" id="2147483656" r:id="R45d0e4226aca4254"/>
-    <p:sldLayoutId xmlns:r="http://schemas.openxmlformats.org/officeDocument/2006/relationships" id="2147483657" r:id="Rbfa81f88f8d54747"/>
-    <p:sldLayoutId xmlns:r="http://schemas.openxmlformats.org/officeDocument/2006/relationships" id="2147483658" r:id="Rebf75ef82afd4660"/>
-    <p:sldLayoutId xmlns:r="http://schemas.openxmlformats.org/officeDocument/2006/relationships" id="2147483659" r:id="Re89aa83020e64573"/>
+    <p:sldLayoutId xmlns:r="http://schemas.openxmlformats.org/officeDocument/2006/relationships" id="2147483649" r:id="R6c8942f00f5f40a8"/>
+    <p:sldLayoutId xmlns:r="http://schemas.openxmlformats.org/officeDocument/2006/relationships" id="2147483650" r:id="R482aa4b453e44db8"/>
+    <p:sldLayoutId xmlns:r="http://schemas.openxmlformats.org/officeDocument/2006/relationships" id="2147483651" r:id="R29089d0d0db24177"/>
+    <p:sldLayoutId xmlns:r="http://schemas.openxmlformats.org/officeDocument/2006/relationships" id="2147483652" r:id="Re31e04483346486e"/>
+    <p:sldLayoutId xmlns:r="http://schemas.openxmlformats.org/officeDocument/2006/relationships" id="2147483653" r:id="Rd2c27773bc1245f7"/>
+    <p:sldLayoutId xmlns:r="http://schemas.openxmlformats.org/officeDocument/2006/relationships" id="2147483654" r:id="R23db868c3b544e3f"/>
+    <p:sldLayoutId xmlns:r="http://schemas.openxmlformats.org/officeDocument/2006/relationships" id="2147483655" r:id="Rac01b1ebda434537"/>
+    <p:sldLayoutId xmlns:r="http://schemas.openxmlformats.org/officeDocument/2006/relationships" id="2147483656" r:id="Rf3c712bb7e594c22"/>
+    <p:sldLayoutId xmlns:r="http://schemas.openxmlformats.org/officeDocument/2006/relationships" id="2147483657" r:id="Rb1b996614a694396"/>
+    <p:sldLayoutId xmlns:r="http://schemas.openxmlformats.org/officeDocument/2006/relationships" id="2147483658" r:id="R3a9a59cde8514472"/>
+    <p:sldLayoutId xmlns:r="http://schemas.openxmlformats.org/officeDocument/2006/relationships" id="2147483659" r:id="R51bc203eb9cf433d"/>
   </p:sldLayoutIdLst>
   <p:txStyles>
     <p:titleStyle>
@@ -5017,28 +4942,6 @@
           </a:p>
         </p:txBody>
       </p:sp>
-      <p:pic>
-        <p:nvPicPr>
-          <p:cNvPr id="24" name=""/>
-          <p:cNvPicPr>
-            <a:picLocks xmlns:a="http://schemas.openxmlformats.org/drawingml/2006/main" noChangeAspect="1"/>
-          </p:cNvPicPr>
-          <p:nvPr/>
-        </p:nvPicPr>
-        <p:blipFill>
-          <a:blip xmlns:r="http://schemas.openxmlformats.org/officeDocument/2006/relationships" xmlns:a="http://schemas.openxmlformats.org/drawingml/2006/main" r:embed="R43324a137fe3442a"/>
-          <a:stretch xmlns:a="http://schemas.openxmlformats.org/drawingml/2006/main"/>
-        </p:blipFill>
-        <p:spPr>
-          <a:xfrm xmlns:a="http://schemas.openxmlformats.org/drawingml/2006/main">
-            <a:off x="5572125" y="1796430"/>
-            <a:ext cx="6048375" cy="3874740"/>
-          </a:xfrm>
-          <a:prstGeom xmlns:a="http://schemas.openxmlformats.org/drawingml/2006/main" prst="rect">
-            <a:avLst/>
-          </a:prstGeom>
-        </p:spPr>
-      </p:pic>
       <p:sp>
         <p:nvSpPr>
           <p:cNvPr id="16" name="">
@@ -5073,6 +4976,7 @@
           <a:lstStyle xmlns:a="http://schemas.openxmlformats.org/drawingml/2006/main"/>
           <a:p xmlns:a="http://schemas.openxmlformats.org/drawingml/2006/main">
             <a:pPr>
+              <a:buNone/>
               <a:defRPr sz="1125">
                 <a:solidFill>
                   <a:srgbClr val="A6B4C8"/>
@@ -5091,11 +4995,39 @@
                 <a:ea typeface="Noto Sans CJK JP"/>
                 <a:cs typeface="Noto Sans CJK JP"/>
               </a:rPr>
-              <a:t>保存済み実画面 / テスト用データ・旧検証版</a:t>
-            </a:r>
-          </a:p>
-        </p:txBody>
-      </p:sp>
+              <a:t>2026-10-08撮影 / Haiku 5.5との通常会話</a:t>
+            </a:r>
+          </a:p>
+        </p:txBody>
+      </p:sp>
+      <p:pic>
+        <p:nvPicPr>
+          <p:cNvPr id="17" name="">
+            <a:extLst xmlns:a="http://schemas.openxmlformats.org/drawingml/2006/main">
+              <a:ext uri="{FF2B5EF4-FFF2-40B4-BE49-F238E27FC236}">
+                <a16:creationId xmlns:a16="http://schemas.microsoft.com/office/drawing/2014/main" id="{CC01F4F1-210E-4336-9271-8A5E09B9ACA5}"/>
+              </a:ext>
+            </a:extLst>
+          </p:cNvPr>
+          <p:cNvPicPr>
+            <a:picLocks xmlns:a="http://schemas.openxmlformats.org/drawingml/2006/main" noChangeAspect="1"/>
+          </p:cNvPicPr>
+          <p:nvPr/>
+        </p:nvPicPr>
+        <p:blipFill>
+          <a:blip xmlns:r="http://schemas.openxmlformats.org/officeDocument/2006/relationships" xmlns:a="http://schemas.openxmlformats.org/drawingml/2006/main" r:embed="R0d2358dab54b47c5"/>
+          <a:stretch xmlns:a="http://schemas.openxmlformats.org/drawingml/2006/main"/>
+        </p:blipFill>
+        <p:spPr>
+          <a:xfrm xmlns:a="http://schemas.openxmlformats.org/drawingml/2006/main">
+            <a:off x="5721242" y="2124075"/>
+            <a:ext cx="5607267" cy="3590925"/>
+          </a:xfrm>
+          <a:prstGeom xmlns:a="http://schemas.openxmlformats.org/drawingml/2006/main" prst="rect">
+            <a:avLst/>
+          </a:prstGeom>
+        </p:spPr>
+      </p:pic>
     </p:spTree>
     <p:extLst>
       <p:ext uri="{BB962C8B-B14F-4D97-AF65-F5344CB8AC3E}">
@@ -5555,7 +5487,7 @@
                 <a:ea typeface="Noto Sans CJK JP"/>
                 <a:cs typeface="Noto Sans CJK JP"/>
               </a:rPr>
-              <a:t>公式ワークフローは、既存Nodeテストを持つ単一課題に対応。</a:t>
+              <a:t>通常の作業は、既存Nodeテストを持つ単一課題に対応。</a:t>
             </a:r>
           </a:p>
         </p:txBody>
@@ -5610,50 +5542,6 @@
           </a:p>
         </p:txBody>
       </p:sp>
-      <p:pic>
-        <p:nvPicPr>
-          <p:cNvPr id="25" name=""/>
-          <p:cNvPicPr>
-            <a:picLocks xmlns:a="http://schemas.openxmlformats.org/drawingml/2006/main" noChangeAspect="1"/>
-          </p:cNvPicPr>
-          <p:nvPr/>
-        </p:nvPicPr>
-        <p:blipFill>
-          <a:blip xmlns:r="http://schemas.openxmlformats.org/officeDocument/2006/relationships" xmlns:a="http://schemas.openxmlformats.org/drawingml/2006/main" r:embed="R5f6728a4cd954c12"/>
-          <a:stretch xmlns:a="http://schemas.openxmlformats.org/drawingml/2006/main"/>
-        </p:blipFill>
-        <p:spPr>
-          <a:xfrm xmlns:a="http://schemas.openxmlformats.org/drawingml/2006/main">
-            <a:off x="4143375" y="3246193"/>
-            <a:ext cx="7477125" cy="575163"/>
-          </a:xfrm>
-          <a:prstGeom xmlns:a="http://schemas.openxmlformats.org/drawingml/2006/main" prst="rect">
-            <a:avLst/>
-          </a:prstGeom>
-        </p:spPr>
-      </p:pic>
-      <p:pic>
-        <p:nvPicPr>
-          <p:cNvPr id="26" name=""/>
-          <p:cNvPicPr>
-            <a:picLocks xmlns:a="http://schemas.openxmlformats.org/drawingml/2006/main" noChangeAspect="1"/>
-          </p:cNvPicPr>
-          <p:nvPr/>
-        </p:nvPicPr>
-        <p:blipFill>
-          <a:blip xmlns:r="http://schemas.openxmlformats.org/officeDocument/2006/relationships" xmlns:a="http://schemas.openxmlformats.org/drawingml/2006/main" r:embed="Rb220f9e88d3348ed"/>
-          <a:stretch xmlns:a="http://schemas.openxmlformats.org/drawingml/2006/main"/>
-        </p:blipFill>
-        <p:spPr>
-          <a:xfrm xmlns:a="http://schemas.openxmlformats.org/drawingml/2006/main">
-            <a:off x="4254089" y="4257675"/>
-            <a:ext cx="7255697" cy="1819275"/>
-          </a:xfrm>
-          <a:prstGeom xmlns:a="http://schemas.openxmlformats.org/drawingml/2006/main" prst="rect">
-            <a:avLst/>
-          </a:prstGeom>
-        </p:spPr>
-      </p:pic>
       <p:sp>
         <p:nvSpPr>
           <p:cNvPr id="17" name="">
@@ -5688,6 +5576,7 @@
           <a:lstStyle xmlns:a="http://schemas.openxmlformats.org/drawingml/2006/main"/>
           <a:p xmlns:a="http://schemas.openxmlformats.org/drawingml/2006/main">
             <a:pPr>
+              <a:buNone/>
               <a:defRPr sz="1125">
                 <a:solidFill>
                   <a:srgbClr val="A6B4C8"/>
@@ -5706,11 +5595,39 @@
                 <a:ea typeface="Noto Sans CJK JP"/>
                 <a:cs typeface="Noto Sans CJK JP"/>
               </a:rPr>
-              <a:t>保存済みの担当選択・結果画面 / 現行は選択中のメインモデルで計画</a:t>
-            </a:r>
-          </a:p>
-        </p:txBody>
-      </p:sp>
+              <a:t>実通信の画面 / Claude Opus 5.5実装・Codexレビュー</a:t>
+            </a:r>
+          </a:p>
+        </p:txBody>
+      </p:sp>
+      <p:pic>
+        <p:nvPicPr>
+          <p:cNvPr id="18" name="">
+            <a:extLst xmlns:a="http://schemas.openxmlformats.org/drawingml/2006/main">
+              <a:ext uri="{FF2B5EF4-FFF2-40B4-BE49-F238E27FC236}">
+                <a16:creationId xmlns:a16="http://schemas.microsoft.com/office/drawing/2014/main" id="{32250F59-A262-418F-8321-779740409C0E}"/>
+              </a:ext>
+            </a:extLst>
+          </p:cNvPr>
+          <p:cNvPicPr>
+            <a:picLocks xmlns:a="http://schemas.openxmlformats.org/drawingml/2006/main" noChangeAspect="1"/>
+          </p:cNvPicPr>
+          <p:nvPr/>
+        </p:nvPicPr>
+        <p:blipFill>
+          <a:blip xmlns:r="http://schemas.openxmlformats.org/officeDocument/2006/relationships" xmlns:a="http://schemas.openxmlformats.org/drawingml/2006/main" r:embed="R3ffbde8687ec489e"/>
+          <a:stretch xmlns:a="http://schemas.openxmlformats.org/drawingml/2006/main"/>
+        </p:blipFill>
+        <p:spPr>
+          <a:xfrm xmlns:a="http://schemas.openxmlformats.org/drawingml/2006/main">
+            <a:off x="5019926" y="2743200"/>
+            <a:ext cx="5895474" cy="3333750"/>
+          </a:xfrm>
+          <a:prstGeom xmlns:a="http://schemas.openxmlformats.org/drawingml/2006/main" prst="rect">
+            <a:avLst/>
+          </a:prstGeom>
+        </p:spPr>
+      </p:pic>
     </p:spTree>
     <p:extLst>
       <p:ext uri="{BB962C8B-B14F-4D97-AF65-F5344CB8AC3E}">
@@ -5954,7 +5871,7 @@
                 <a:ea typeface="Noto Sans CJK JP"/>
                 <a:cs typeface="Noto Sans CJK JP"/>
               </a:rPr>
-              <a:t>一周の流れが見えるから、AIの働き方を理解できる。</a:t>
+              <a:t>通常のワークフローを、担当と工程で確認する。</a:t>
             </a:r>
           </a:p>
         </p:txBody>
@@ -5976,7 +5893,7 @@
         <p:spPr>
           <a:xfrm xmlns:a="http://schemas.openxmlformats.org/drawingml/2006/main">
             <a:off x="594360" y="3108960"/>
-            <a:ext cx="3381375" cy="2857500"/>
+            <a:ext cx="6429375" cy="2857500"/>
           </a:xfrm>
           <a:prstGeom xmlns:a="http://schemas.openxmlformats.org/drawingml/2006/main" prst="rect">
             <a:avLst/>
@@ -5987,7 +5904,18 @@
           <a:bodyPr xmlns:a="http://schemas.openxmlformats.org/drawingml/2006/main" wrap="square" lIns="0" tIns="0" rIns="0" bIns="0">
             <a:noAutofit/>
           </a:bodyPr>
-          <a:lstStyle xmlns:a="http://schemas.openxmlformats.org/drawingml/2006/main"/>
+          <a:lstStyle xmlns:a="http://schemas.openxmlformats.org/drawingml/2006/main">
+            <a:defPPr>
+              <a:defRPr sz="1800">
+                <a:solidFill>
+                  <a:srgbClr val="F4F6FA"/>
+                </a:solidFill>
+                <a:latin typeface="Noto Sans CJK JP"/>
+                <a:ea typeface="Noto Sans CJK JP"/>
+                <a:cs typeface="Noto Sans CJK JP"/>
+              </a:defRPr>
+            </a:defPPr>
+          </a:lstStyle>
           <a:p xmlns:a="http://schemas.openxmlformats.org/drawingml/2006/main">
             <a:pPr>
               <a:spcAft>
@@ -6012,7 +5940,7 @@
                 <a:ea typeface="Noto Sans CJK JP"/>
                 <a:cs typeface="Noto Sans CJK JP"/>
               </a:rPr>
-              <a:t>文脈の組み立てから</a:t>
+              <a:t>モデルは計画と回答を生成。</a:t>
             </a:r>
           </a:p>
           <a:p xmlns:a="http://schemas.openxmlformats.org/drawingml/2006/main">
@@ -6039,7 +5967,7 @@
                 <a:ea typeface="Noto Sans CJK JP"/>
                 <a:cs typeface="Noto Sans CJK JP"/>
               </a:rPr>
-              <a:t>通信・権限・実行・記録まで。</a:t>
+              <a:t>公式実行基盤がツールを実行。</a:t>
             </a:r>
           </a:p>
           <a:p xmlns:a="http://schemas.openxmlformats.org/drawingml/2006/main">
@@ -6085,7 +6013,7 @@
                 <a:ea typeface="Noto Sans CJK JP"/>
                 <a:cs typeface="Noto Sans CJK JP"/>
               </a:rPr>
-              <a:t>6つのSTEPで、</a:t>
+              <a:t>ハーネスは承認の確認、</a:t>
             </a:r>
           </a:p>
           <a:p xmlns:a="http://schemas.openxmlformats.org/drawingml/2006/main">
@@ -6112,7 +6040,7 @@
                 <a:ea typeface="Noto Sans CJK JP"/>
                 <a:cs typeface="Noto Sans CJK JP"/>
               </a:rPr>
-              <a:t>誰が何をしたかを追う。</a:t>
+              <a:t>独立テスト・Git・記録を担当。</a:t>
             </a:r>
           </a:p>
         </p:txBody>
@@ -6170,7 +6098,7 @@
                 <a:ea typeface="Noto Sans CJK JP"/>
                 <a:cs typeface="Noto Sans CJK JP"/>
               </a:rPr>
-              <a:t>TranscriptとLoopFlowを切り替えて、会話と処理を確認。</a:t>
+              <a:t>最新の保存workflowを表示。質問で不要な工程を完了扱いにしません。</a:t>
             </a:r>
           </a:p>
         </p:txBody>
@@ -6225,46 +6153,24 @@
           </a:p>
         </p:txBody>
       </p:sp>
-      <p:pic>
-        <p:nvPicPr>
-          <p:cNvPr id="19" name=""/>
-          <p:cNvPicPr>
-            <a:picLocks xmlns:a="http://schemas.openxmlformats.org/drawingml/2006/main" noChangeAspect="1"/>
-          </p:cNvPicPr>
+      <p:sp>
+        <p:nvSpPr>
+          <p:cNvPr id="11" name="">
+            <a:extLst xmlns:a="http://schemas.openxmlformats.org/drawingml/2006/main">
+              <a:ext uri="{FF2B5EF4-FFF2-40B4-BE49-F238E27FC236}">
+                <a16:creationId xmlns:a16="http://schemas.microsoft.com/office/drawing/2014/main" id="{26ABDB81-E01A-46B2-ACF8-2D5BE7AC91C6}"/>
+              </a:ext>
+            </a:extLst>
+          </p:cNvPr>
+          <p:cNvSpPr>
+            <a:spLocks xmlns:a="http://schemas.openxmlformats.org/drawingml/2006/main" noGrp="1"/>
+          </p:cNvSpPr>
           <p:nvPr/>
-        </p:nvPicPr>
-        <p:blipFill>
-          <a:blip xmlns:r="http://schemas.openxmlformats.org/officeDocument/2006/relationships" xmlns:a="http://schemas.openxmlformats.org/drawingml/2006/main" r:embed="Ra9d862fcfd8c4592"/>
-          <a:stretch xmlns:a="http://schemas.openxmlformats.org/drawingml/2006/main"/>
-        </p:blipFill>
+        </p:nvSpPr>
         <p:spPr>
           <a:xfrm xmlns:a="http://schemas.openxmlformats.org/drawingml/2006/main">
-            <a:off x="4325566" y="2943225"/>
-            <a:ext cx="7112742" cy="3162300"/>
-          </a:xfrm>
-          <a:prstGeom xmlns:a="http://schemas.openxmlformats.org/drawingml/2006/main" prst="rect">
-            <a:avLst/>
-          </a:prstGeom>
-        </p:spPr>
-      </p:pic>
-      <p:sp>
-        <p:nvSpPr>
-          <p:cNvPr id="11" name="">
-            <a:extLst xmlns:a="http://schemas.openxmlformats.org/drawingml/2006/main">
-              <a:ext uri="{FF2B5EF4-FFF2-40B4-BE49-F238E27FC236}">
-                <a16:creationId xmlns:a16="http://schemas.microsoft.com/office/drawing/2014/main" id="{26ABDB81-E01A-46B2-ACF8-2D5BE7AC91C6}"/>
-              </a:ext>
-            </a:extLst>
-          </p:cNvPr>
-          <p:cNvSpPr>
-            <a:spLocks xmlns:a="http://schemas.openxmlformats.org/drawingml/2006/main" noGrp="1"/>
-          </p:cNvSpPr>
-          <p:nvPr/>
-        </p:nvSpPr>
-        <p:spPr>
-          <a:xfrm xmlns:a="http://schemas.openxmlformats.org/drawingml/2006/main">
-            <a:off x="4143375" y="6124575"/>
-            <a:ext cx="7477125" cy="219075"/>
+            <a:off x="7381875" y="6124575"/>
+            <a:ext cx="4314825" cy="219075"/>
           </a:xfrm>
           <a:prstGeom xmlns:a="http://schemas.openxmlformats.org/drawingml/2006/main" prst="rect">
             <a:avLst/>
@@ -6281,6 +6187,7 @@
           <a:lstStyle xmlns:a="http://schemas.openxmlformats.org/drawingml/2006/main"/>
           <a:p xmlns:a="http://schemas.openxmlformats.org/drawingml/2006/main">
             <a:pPr>
+              <a:buNone/>
               <a:defRPr sz="1125">
                 <a:solidFill>
                   <a:srgbClr val="A6B4C8"/>
@@ -6299,11 +6206,39 @@
                 <a:ea typeface="Noto Sans CJK JP"/>
                 <a:cs typeface="Noto Sans CJK JP"/>
               </a:rPr>
-              <a:t>保存済み実画面 / テスト用データ・旧検証版</a:t>
-            </a:r>
-          </a:p>
-        </p:txBody>
-      </p:sp>
+              <a:t>実通信の画面 / Codex実装・Haiku 5.5レビュー</a:t>
+            </a:r>
+          </a:p>
+        </p:txBody>
+      </p:sp>
+      <p:pic>
+        <p:nvPicPr>
+          <p:cNvPr id="12" name="">
+            <a:extLst xmlns:a="http://schemas.openxmlformats.org/drawingml/2006/main">
+              <a:ext uri="{FF2B5EF4-FFF2-40B4-BE49-F238E27FC236}">
+                <a16:creationId xmlns:a16="http://schemas.microsoft.com/office/drawing/2014/main" id="{3706A78E-C229-4BD4-A7BB-FF53B19AFF4E}"/>
+              </a:ext>
+            </a:extLst>
+          </p:cNvPr>
+          <p:cNvPicPr>
+            <a:picLocks xmlns:a="http://schemas.openxmlformats.org/drawingml/2006/main" noChangeAspect="1"/>
+          </p:cNvPicPr>
+          <p:nvPr/>
+        </p:nvPicPr>
+        <p:blipFill>
+          <a:blip xmlns:r="http://schemas.openxmlformats.org/officeDocument/2006/relationships" xmlns:a="http://schemas.openxmlformats.org/drawingml/2006/main" r:embed="Rfb398929ad204c46"/>
+          <a:stretch xmlns:a="http://schemas.openxmlformats.org/drawingml/2006/main"/>
+        </p:blipFill>
+        <p:spPr>
+          <a:xfrm xmlns:a="http://schemas.openxmlformats.org/drawingml/2006/main">
+            <a:off x="7710488" y="1952625"/>
+            <a:ext cx="3581400" cy="4029075"/>
+          </a:xfrm>
+          <a:prstGeom xmlns:a="http://schemas.openxmlformats.org/drawingml/2006/main" prst="rect">
+            <a:avLst/>
+          </a:prstGeom>
+        </p:spPr>
+      </p:pic>
     </p:spTree>
     <p:extLst>
       <p:ext uri="{BB962C8B-B14F-4D97-AF65-F5344CB8AC3E}">
@@ -6790,7 +6725,7 @@
                 <a:ea typeface="Noto Sans CJK JP"/>
                 <a:cs typeface="Noto Sans CJK JP"/>
               </a:rPr>
-              <a:t>保存範囲内の記録を閲覧。ブラウザだけで開け、処理は再実行しません。</a:t>
+              <a:t>画面は旧経路のデモ記録。通常workflowでは保存済みの証跡を閲覧します。</a:t>
             </a:r>
           </a:p>
         </p:txBody>
@@ -6847,14 +6782,20 @@
       </p:sp>
       <p:pic>
         <p:nvPicPr>
-          <p:cNvPr id="27" name=""/>
+          <p:cNvPr id="27" name="">
+            <a:extLst xmlns:a="http://schemas.openxmlformats.org/drawingml/2006/main">
+              <a:ext uri="{FF2B5EF4-FFF2-40B4-BE49-F238E27FC236}">
+                <a16:creationId xmlns:a16="http://schemas.microsoft.com/office/drawing/2014/main" id="{4E40EF87-7F98-46E3-9A4C-A3E58ADBBCEE}"/>
+              </a:ext>
+            </a:extLst>
+          </p:cNvPr>
           <p:cNvPicPr>
             <a:picLocks xmlns:a="http://schemas.openxmlformats.org/drawingml/2006/main" noChangeAspect="1"/>
           </p:cNvPicPr>
           <p:nvPr/>
         </p:nvPicPr>
         <p:blipFill>
-          <a:blip xmlns:r="http://schemas.openxmlformats.org/officeDocument/2006/relationships" xmlns:a="http://schemas.openxmlformats.org/drawingml/2006/main" r:embed="Rd62d90124f824090"/>
+          <a:blip xmlns:r="http://schemas.openxmlformats.org/officeDocument/2006/relationships" xmlns:a="http://schemas.openxmlformats.org/drawingml/2006/main" r:embed="R722c3272055e4174"/>
           <a:stretch xmlns:a="http://schemas.openxmlformats.org/drawingml/2006/main"/>
         </p:blipFill>
         <p:spPr>
@@ -6901,6 +6842,7 @@
           <a:lstStyle xmlns:a="http://schemas.openxmlformats.org/drawingml/2006/main"/>
           <a:p xmlns:a="http://schemas.openxmlformats.org/drawingml/2006/main">
             <a:pPr>
+              <a:buNone/>
               <a:defRPr sz="1125">
                 <a:solidFill>
                   <a:srgbClr val="A6B4C8"/>
@@ -7410,7 +7352,7 @@
                 <a:ea typeface="Noto Sans CJK JP"/>
                 <a:cs typeface="Noto Sans CJK JP"/>
               </a:rPr>
-              <a:t>同じプロジェクト内に限定。権限・system・認証情報は引き継ぎません。</a:t>
+              <a:t>旧実行経路の機能。現在の通常workflowでは完了結果の受け渡しに未対応。</a:t>
             </a:r>
           </a:p>
         </p:txBody>
@@ -7467,14 +7409,20 @@
       </p:sp>
       <p:pic>
         <p:nvPicPr>
-          <p:cNvPr id="27" name=""/>
+          <p:cNvPr id="27" name="">
+            <a:extLst xmlns:a="http://schemas.openxmlformats.org/drawingml/2006/main">
+              <a:ext uri="{FF2B5EF4-FFF2-40B4-BE49-F238E27FC236}">
+                <a16:creationId xmlns:a16="http://schemas.microsoft.com/office/drawing/2014/main" id="{6679C7FC-274B-4AD7-A734-3B87FE4B2C66}"/>
+              </a:ext>
+            </a:extLst>
+          </p:cNvPr>
           <p:cNvPicPr>
             <a:picLocks xmlns:a="http://schemas.openxmlformats.org/drawingml/2006/main" noChangeAspect="1"/>
           </p:cNvPicPr>
           <p:nvPr/>
         </p:nvPicPr>
         <p:blipFill>
-          <a:blip xmlns:r="http://schemas.openxmlformats.org/officeDocument/2006/relationships" xmlns:a="http://schemas.openxmlformats.org/drawingml/2006/main" r:embed="R05995775f0f34d62"/>
+          <a:blip xmlns:r="http://schemas.openxmlformats.org/officeDocument/2006/relationships" xmlns:a="http://schemas.openxmlformats.org/drawingml/2006/main" r:embed="Ra8ff5fc8a6e647ad"/>
           <a:stretch xmlns:a="http://schemas.openxmlformats.org/drawingml/2006/main"/>
         </p:blipFill>
         <p:spPr>
@@ -7521,6 +7469,7 @@
           <a:lstStyle xmlns:a="http://schemas.openxmlformats.org/drawingml/2006/main"/>
           <a:p xmlns:a="http://schemas.openxmlformats.org/drawingml/2006/main">
             <a:pPr>
+              <a:buNone/>
               <a:defRPr sz="1125">
                 <a:solidFill>
                   <a:srgbClr val="A6B4C8"/>
@@ -7539,7 +7488,7 @@
                 <a:ea typeface="Noto Sans CJK JP"/>
                 <a:cs typeface="Noto Sans CJK JP"/>
               </a:rPr>
-              <a:t>保存済み実画面 / テスト用データ・旧検証版</a:t>
+              <a:t>旧経路の模擬画面 / 現在の通常workflowでは利用不可</a:t>
             </a:r>
           </a:p>
         </p:txBody>
@@ -8003,7 +7952,7 @@
                 <a:ea typeface="Noto Sans CJK JP"/>
                 <a:cs typeface="Noto Sans CJK JP"/>
               </a:rPr>
-              <a:t>既存通常会話の対応経路に限定。公式workflow途中の自動再開は対象外。</a:t>
+              <a:t>旧実行経路の対応機能。現在の通常workflowは自動再開の対象外。</a:t>
             </a:r>
           </a:p>
         </p:txBody>
@@ -8060,14 +8009,20 @@
       </p:sp>
       <p:pic>
         <p:nvPicPr>
-          <p:cNvPr id="27" name=""/>
+          <p:cNvPr id="27" name="">
+            <a:extLst xmlns:a="http://schemas.openxmlformats.org/drawingml/2006/main">
+              <a:ext uri="{FF2B5EF4-FFF2-40B4-BE49-F238E27FC236}">
+                <a16:creationId xmlns:a16="http://schemas.microsoft.com/office/drawing/2014/main" id="{A3F61A7F-728A-4C88-8BD1-E1E3B9D7EF7F}"/>
+              </a:ext>
+            </a:extLst>
+          </p:cNvPr>
           <p:cNvPicPr>
             <a:picLocks xmlns:a="http://schemas.openxmlformats.org/drawingml/2006/main" noChangeAspect="1"/>
           </p:cNvPicPr>
           <p:nvPr/>
         </p:nvPicPr>
         <p:blipFill>
-          <a:blip xmlns:r="http://schemas.openxmlformats.org/officeDocument/2006/relationships" xmlns:a="http://schemas.openxmlformats.org/drawingml/2006/main" r:embed="R7ba8fa3471cb4b11"/>
+          <a:blip xmlns:r="http://schemas.openxmlformats.org/officeDocument/2006/relationships" xmlns:a="http://schemas.openxmlformats.org/drawingml/2006/main" r:embed="R903fbeb1774a4000"/>
           <a:stretch xmlns:a="http://schemas.openxmlformats.org/drawingml/2006/main"/>
         </p:blipFill>
         <p:spPr>
@@ -8114,6 +8069,7 @@
           <a:lstStyle xmlns:a="http://schemas.openxmlformats.org/drawingml/2006/main"/>
           <a:p xmlns:a="http://schemas.openxmlformats.org/drawingml/2006/main">
             <a:pPr>
+              <a:buNone/>
               <a:defRPr sz="1125">
                 <a:solidFill>
                   <a:srgbClr val="A6B4C8"/>
@@ -8623,7 +8579,7 @@
                 <a:ea typeface="Noto Sans CJK JP"/>
                 <a:cs typeface="Noto Sans CJK JP"/>
               </a:rPr>
-              <a:t>記録済みの委託関係を表示。自由な双方向セッション会話を示すものではありません。</a:t>
+              <a:t>旧経路の子エージェント記録例。現在の通常workflowの内部往復を示すものではありません。</a:t>
             </a:r>
           </a:p>
         </p:txBody>
@@ -8680,14 +8636,20 @@
       </p:sp>
       <p:pic>
         <p:nvPicPr>
-          <p:cNvPr id="27" name=""/>
+          <p:cNvPr id="27" name="">
+            <a:extLst xmlns:a="http://schemas.openxmlformats.org/drawingml/2006/main">
+              <a:ext uri="{FF2B5EF4-FFF2-40B4-BE49-F238E27FC236}">
+                <a16:creationId xmlns:a16="http://schemas.microsoft.com/office/drawing/2014/main" id="{B7456FC1-7907-4EFE-B5A6-51C38D696EE5}"/>
+              </a:ext>
+            </a:extLst>
+          </p:cNvPr>
           <p:cNvPicPr>
             <a:picLocks xmlns:a="http://schemas.openxmlformats.org/drawingml/2006/main" noChangeAspect="1"/>
           </p:cNvPicPr>
           <p:nvPr/>
         </p:nvPicPr>
         <p:blipFill>
-          <a:blip xmlns:r="http://schemas.openxmlformats.org/officeDocument/2006/relationships" xmlns:a="http://schemas.openxmlformats.org/drawingml/2006/main" r:embed="R1c631e8b7fbd4b2c"/>
+          <a:blip xmlns:r="http://schemas.openxmlformats.org/officeDocument/2006/relationships" xmlns:a="http://schemas.openxmlformats.org/drawingml/2006/main" r:embed="R199bdf3c45d6443f"/>
           <a:stretch xmlns:a="http://schemas.openxmlformats.org/drawingml/2006/main"/>
         </p:blipFill>
         <p:spPr>
@@ -8734,6 +8696,7 @@
           <a:lstStyle xmlns:a="http://schemas.openxmlformats.org/drawingml/2006/main"/>
           <a:p xmlns:a="http://schemas.openxmlformats.org/drawingml/2006/main">
             <a:pPr>
+              <a:buNone/>
               <a:defRPr sz="1125">
                 <a:solidFill>
                   <a:srgbClr val="A6B4C8"/>
